--- a/SarafAI_Presentation.pptx
+++ b/SarafAI_Presentation.pptx
@@ -8316,7 +8316,7 @@
                 </a:solidFill>
                 <a:latin typeface="Calibri"/>
               </a:rPr>
-              <a:t>Zero-dependency web app — runs in any browser, works on a low-end Android phone over 3G.</a:t>
+              <a:t>Zero-dependency web app — opens with a built-in guided tour walking judges through the full loop. Runs in any browser, works on a low-end Android phone over 3G.</a:t>
             </a:r>
           </a:p>
         </p:txBody>
